--- a/public/fun/pack/pptx/birthdaypro/돌잔치프리미엄_19_감사인사중심_레몬크림.pptx
+++ b/public/fun/pack/pptx/birthdaypro/돌잔치프리미엄_19_감사인사중심_레몬크림.pptx
@@ -112,12 +112,12 @@
   <p:extLst>
     <p:ext uri="{521415D9-36F7-43E2-AB2F-B90AF26B5E84}">
       <p14:sectionLst xmlns:p14="http://schemas.microsoft.com/office/powerpoint/2010/main">
-        <p14:section name="시작" id="{FB12E823-349E-4F41-90E8-E1ED393EBE6A}">
+        <p14:section name="시작" id="{40844043-DDA4-45AC-9885-E94C75A20DFC}">
           <p14:sldIdLst>
             <p14:sldId id="256"/>
           </p14:sldIdLst>
         </p14:section>
-        <p14:section name="본문" id="{F2BF25A3-90E8-4D80-8140-1B3116525690}">
+        <p14:section name="본문" id="{BACB0602-03EE-4708-A985-797B45D25504}">
           <p14:sldIdLst>
             <p14:sldId id="257"/>
             <p14:sldId id="258"/>
@@ -125,7 +125,7 @@
             <p14:sldId id="260"/>
           </p14:sldIdLst>
         </p14:section>
-        <p14:section name="마무리" id="{DD838DFD-A579-4537-BCDC-F9B6FF222D92}">
+        <p14:section name="마무리" id="{B3D8B402-492B-4748-8DCD-431772A93331}">
           <p14:sldIdLst>
             <p14:sldId id="261"/>
           </p14:sldIdLst>
@@ -1525,7 +1525,7 @@
             </a:lvl1pPr>
           </a:lstStyle>
           <a:p>
-            <a:fld id="{1C2D6AB3-29F5-485B-AF30-3A17E02F813A}" type="slidenum">
+            <a:fld id="{834EC9E4-23A3-4644-B467-C448E015218E}" type="slidenum">
               <a:rPr lang="en-US"/>
               <a:t>‹#›</a:t>
             </a:fld>
@@ -2354,7 +2354,7 @@
             </a:lvl1pPr>
           </a:lstStyle>
           <a:p>
-            <a:fld id="{ED9BD6D8-CB96-49E2-98B8-8A97C933146D}" type="slidenum">
+            <a:fld id="{86B6AB3C-C869-4A9C-BB4F-E3A33886DFC1}" type="slidenum">
               <a:rPr lang="en-US"/>
               <a:t>‹#›</a:t>
             </a:fld>
@@ -3107,7 +3107,7 @@
             </a:lvl1pPr>
           </a:lstStyle>
           <a:p>
-            <a:fld id="{6758244B-A1E5-41D9-B45B-763E1B4809C3}" type="slidenum">
+            <a:fld id="{C605C89B-075E-4446-9708-91F1B5EF0E2B}" type="slidenum">
               <a:rPr lang="en-US"/>
               <a:t>‹#›</a:t>
             </a:fld>
@@ -4055,7 +4055,7 @@
           <a:p>
             <a:r>
               <a:rPr lang="ko-KR"/>
-              <a:t>아기 이름 · 0000. 00. 00</a:t>
+              <a:t>아기 이름 · 날짜 입력</a:t>
             </a:r>
           </a:p>
           <a:p>
@@ -4218,7 +4218,7 @@
           <a:bodyPr/>
           <a:lstStyle/>
           <a:p>
-            <a:fld id="{B446F3F4-EFDF-445B-A5BD-75737353D5E7}" type="slidenum">
+            <a:fld id="{2C8383C4-40C9-47ED-B0AE-14C013B3C8CE}" type="slidenum">
               <a:rPr lang="en-US"/>
               <a:t>‹#›</a:t>
             </a:fld>
@@ -4818,7 +4818,7 @@
           <a:bodyPr/>
           <a:lstStyle/>
           <a:p>
-            <a:fld id="{70078BEF-2EC2-4C82-941E-0688B85F7A65}" type="slidenum">
+            <a:fld id="{D06687B1-ED09-4E11-A61E-71832BB8C64E}" type="slidenum">
               <a:rPr lang="en-US"/>
               <a:t>‹#›</a:t>
             </a:fld>
@@ -5145,7 +5145,7 @@
           <a:bodyPr/>
           <a:lstStyle/>
           <a:p>
-            <a:fld id="{3AD2DCCA-2420-4A17-BEEF-DC52930913AD}" type="slidenum">
+            <a:fld id="{E60A7CC1-2492-4209-AF05-4AD9BD99CD98}" type="slidenum">
               <a:rPr lang="en-US"/>
               <a:t>‹#›</a:t>
             </a:fld>
@@ -6000,7 +6000,7 @@
           <a:bodyPr/>
           <a:lstStyle/>
           <a:p>
-            <a:fld id="{CCA76EAD-822A-4577-AA49-21C3C589645A}" type="slidenum">
+            <a:fld id="{8DBE007F-027D-40D7-BFD1-AC7B237185CF}" type="slidenum">
               <a:rPr lang="en-US"/>
               <a:t>‹#›</a:t>
             </a:fld>
